--- a/Presentacion_Final_Churn_Grupo1.pptx
+++ b/Presentacion_Final_Churn_Grupo1.pptx
@@ -2800,13 +2800,11 @@
               <a:buNone/>
             </a:pPr>
             <a:r>
-              <a:rPr lang="en-US" sz="1200" b="1" kern="0" spc="300" dirty="0">
+              <a:rPr sz="1200" b="1">
                 <a:solidFill>
                   <a:srgbClr val="DA6A3C"/>
                 </a:solidFill>
-                <a:latin typeface="Calibri" pitchFamily="34" charset="0"/>
-                <a:ea typeface="Calibri" pitchFamily="34" charset="-122"/>
-                <a:cs typeface="Calibri" pitchFamily="34" charset="-120"/>
+                <a:latin typeface="Calibri"/>
               </a:rPr>
               <a:t>04  ·  FEATURE ENGINEERING</a:t>
             </a:r>
@@ -2835,21 +2833,15 @@
           <a:bodyPr wrap="square" lIns="0" tIns="0" rIns="0" bIns="0" rtlCol="0" anchor="ctr"/>
           <a:lstStyle/>
           <a:p>
-            <a:pPr marL="0" indent="0">
-              <a:buNone/>
-            </a:pPr>
-            <a:r>
-              <a:rPr lang="en-US" sz="2700" b="1" dirty="0">
+            <a:r>
+              <a:rPr sz="2700" b="1">
                 <a:solidFill>
                   <a:srgbClr val="1C2B3A"/>
                 </a:solidFill>
-                <a:latin typeface="Georgia" pitchFamily="34" charset="0"/>
-                <a:ea typeface="Georgia" pitchFamily="34" charset="-122"/>
-                <a:cs typeface="Georgia" pitchFamily="34" charset="-120"/>
-              </a:rPr>
-              <a:t>Tres variables de intensidad, deterministas</a:t>
-            </a:r>
-            <a:endParaRPr lang="en-US" sz="2700" dirty="0"/>
+                <a:latin typeface="Georgia"/>
+              </a:rPr>
+              <a:t>Tres ratios de intensidad, deterministas y con sentido de negocio</a:t>
+            </a:r>
           </a:p>
         </p:txBody>
       </p:sp>
@@ -3489,21 +3481,28 @@
           <a:bodyPr wrap="square" lIns="0" tIns="0" rIns="0" bIns="0" rtlCol="0" anchor="ctr"/>
           <a:lstStyle/>
           <a:p>
-            <a:pPr marL="0" indent="0" algn="ctr">
-              <a:buNone/>
-            </a:pPr>
-            <a:r>
-              <a:rPr lang="en-US" sz="1250" i="1" dirty="0">
-                <a:solidFill>
-                  <a:srgbClr val="6E7A88"/>
-                </a:solidFill>
-                <a:latin typeface="Calibri" pitchFamily="34" charset="0"/>
-                <a:ea typeface="Calibri" pitchFamily="34" charset="-122"/>
-                <a:cs typeface="Calibri" pitchFamily="34" charset="-120"/>
-              </a:rPr>
-              <a:t>Deterministas  ·  no usan el target  ·  generadas por separado en train y test  ·  el +1 evita dividir por cero  ·  antes del ColumnTransformer</a:t>
-            </a:r>
-            <a:endParaRPr lang="en-US" sz="1250" dirty="0"/>
+            <a:pPr algn="ctr"/>
+            <a:r>
+              <a:rPr sz="1150" b="1">
+                <a:solidFill>
+                  <a:srgbClr val="1E3A5F"/>
+                </a:solidFill>
+                <a:latin typeface="Calibri"/>
+              </a:rPr>
+              <a:t>Calculadas sin target y por separado en train y test, antes del preprocesamiento del modelo.</a:t>
+            </a:r>
+          </a:p>
+          <a:p>
+            <a:pPr algn="ctr"/>
+            <a:r>
+              <a:rPr sz="1150" b="0">
+                <a:solidFill>
+                  <a:srgbClr val="1C2B3A"/>
+                </a:solidFill>
+                <a:latin typeface="Calibri"/>
+              </a:rPr>
+              <a:t>Miden intensidad relativa del cliente; el +1 evita divisiones por cero.</a:t>
+            </a:r>
           </a:p>
         </p:txBody>
       </p:sp>
@@ -19984,21 +19983,28 @@
           <a:bodyPr wrap="square" lIns="0" tIns="0" rIns="0" bIns="0" rtlCol="0" anchor="t"/>
           <a:lstStyle/>
           <a:p>
-            <a:pPr marL="0" indent="0" algn="ctr">
-              <a:buNone/>
-            </a:pPr>
-            <a:r>
-              <a:rPr lang="en-US" sz="1100" dirty="0">
+            <a:pPr algn="ctr"/>
+            <a:r>
+              <a:rPr sz="1100" b="0">
                 <a:solidFill>
                   <a:srgbClr val="6E7A88"/>
                 </a:solidFill>
-                <a:latin typeface="Calibri" pitchFamily="34" charset="0"/>
-                <a:ea typeface="Calibri" pitchFamily="34" charset="-122"/>
-                <a:cs typeface="Calibri" pitchFamily="34" charset="-120"/>
-              </a:rPr>
-              <a:t>variables predictoras (+ ID + target)</a:t>
-            </a:r>
-            <a:endParaRPr lang="en-US" sz="1100" dirty="0"/>
+                <a:latin typeface="Calibri"/>
+              </a:rPr>
+              <a:t>variables explicativas</a:t>
+            </a:r>
+          </a:p>
+          <a:p>
+            <a:pPr algn="ctr"/>
+            <a:r>
+              <a:rPr sz="1100" b="0">
+                <a:solidFill>
+                  <a:srgbClr val="6E7A88"/>
+                </a:solidFill>
+                <a:latin typeface="Calibri"/>
+              </a:rPr>
+              <a:t>+ CustomerID y Churn</a:t>
+            </a:r>
           </a:p>
         </p:txBody>
       </p:sp>
@@ -20859,21 +20865,15 @@
           <a:bodyPr wrap="square" lIns="0" tIns="0" rIns="0" bIns="0" rtlCol="0" anchor="ctr"/>
           <a:lstStyle/>
           <a:p>
-            <a:pPr marL="0" indent="0">
-              <a:buNone/>
-            </a:pPr>
-            <a:r>
-              <a:rPr lang="en-US" sz="1200" b="1" kern="0" spc="300" dirty="0">
+            <a:r>
+              <a:rPr sz="1200" b="1">
                 <a:solidFill>
                   <a:srgbClr val="DA6A3C"/>
                 </a:solidFill>
-                <a:latin typeface="Calibri" pitchFamily="34" charset="0"/>
-                <a:ea typeface="Calibri" pitchFamily="34" charset="-122"/>
-                <a:cs typeface="Calibri" pitchFamily="34" charset="-120"/>
-              </a:rPr>
-              <a:t>02  ·  AUDITORÍA DE CALIDAD E IMPUTACIÓN</a:t>
-            </a:r>
-            <a:endParaRPr lang="en-US" sz="1200" dirty="0"/>
+                <a:latin typeface="Calibri"/>
+              </a:rPr>
+              <a:t>02  ·  AUDITORÍA, IMPUTACIÓN Y OUTLIERS</a:t>
+            </a:r>
           </a:p>
         </p:txBody>
       </p:sp>
@@ -20898,21 +20898,15 @@
           <a:bodyPr wrap="square" lIns="0" tIns="0" rIns="0" bIns="0" rtlCol="0" anchor="ctr"/>
           <a:lstStyle/>
           <a:p>
-            <a:pPr marL="0" indent="0">
-              <a:buNone/>
-            </a:pPr>
-            <a:r>
-              <a:rPr lang="en-US" sz="2700" b="1" dirty="0">
+            <a:r>
+              <a:rPr sz="2700" b="1">
                 <a:solidFill>
                   <a:srgbClr val="1C2B3A"/>
                 </a:solidFill>
-                <a:latin typeface="Georgia" pitchFamily="34" charset="0"/>
-                <a:ea typeface="Georgia" pitchFamily="34" charset="-122"/>
-                <a:cs typeface="Georgia" pitchFamily="34" charset="-120"/>
-              </a:rPr>
-              <a:t>Limpieza reproducible, sin fugas</a:t>
-            </a:r>
-            <a:endParaRPr lang="en-US" sz="2700" dirty="0"/>
+                <a:latin typeface="Georgia"/>
+              </a:rPr>
+              <a:t>Limpieza reproducible, sin fugas ni borrado automático</a:t>
+            </a:r>
           </a:p>
         </p:txBody>
       </p:sp>
@@ -21953,21 +21947,15 @@
           <a:bodyPr wrap="square" lIns="0" tIns="0" rIns="0" bIns="0" rtlCol="0" anchor="ctr"/>
           <a:lstStyle/>
           <a:p>
-            <a:pPr marL="0" indent="0">
-              <a:buNone/>
-            </a:pPr>
-            <a:r>
-              <a:rPr lang="en-US" sz="1400" b="1" dirty="0">
+            <a:r>
+              <a:rPr sz="1400" b="1">
                 <a:solidFill>
                   <a:srgbClr val="1C2B3A"/>
                 </a:solidFill>
-                <a:latin typeface="Georgia" pitchFamily="34" charset="0"/>
-                <a:ea typeface="Georgia" pitchFamily="34" charset="-122"/>
-                <a:cs typeface="Georgia" pitchFamily="34" charset="-120"/>
-              </a:rPr>
-              <a:t>Estrategia de imputación</a:t>
-            </a:r>
-            <a:endParaRPr lang="en-US" sz="1400" dirty="0"/>
+                <a:latin typeface="Georgia"/>
+              </a:rPr>
+              <a:t>Imputación y outliers</a:t>
+            </a:r>
           </a:p>
         </p:txBody>
       </p:sp>
@@ -21992,443 +21980,114 @@
           <a:bodyPr wrap="square" rtlCol="0" anchor="t"/>
           <a:lstStyle/>
           <a:p>
-            <a:pPr marL="342900" indent="-342900">
-              <a:spcAft>
-                <a:spcPts val="600"/>
-              </a:spcAft>
-              <a:buSzPct val="100000"/>
-              <a:buChar char="•"/>
-            </a:pPr>
-            <a:r>
-              <a:rPr lang="en-US" sz="1250" dirty="0">
+            <a:r>
+              <a:rPr sz="860" b="1">
+                <a:solidFill>
+                  <a:srgbClr val="1E3A5F"/>
+                </a:solidFill>
+                <a:latin typeface="Calibri"/>
+              </a:rPr>
+              <a:t>Mediana - WarehouseToHome, CouponUsed</a:t>
+            </a:r>
+          </a:p>
+          <a:p>
+            <a:r>
+              <a:rPr sz="860" b="0">
                 <a:solidFill>
                   <a:srgbClr val="1C2B3A"/>
                 </a:solidFill>
-                <a:latin typeface="Calibri" pitchFamily="34" charset="0"/>
-                <a:ea typeface="Calibri" pitchFamily="34" charset="-122"/>
-                <a:cs typeface="Calibri" pitchFamily="34" charset="-120"/>
-              </a:rPr>
-              <a:t>Mediana  —  WarehouseToHome, </a:t>
-            </a:r>
-            <a:r>
-              <a:rPr lang="en-US" sz="1250" dirty="0" err="1">
+                <a:latin typeface="Calibri"/>
+              </a:rPr>
+              <a:t>Sin patrón predictivo claro frente al resto de variables</a:t>
+            </a:r>
+          </a:p>
+          <a:p>
+            <a:r>
+              <a:rPr sz="860" b="0">
                 <a:solidFill>
                   <a:srgbClr val="1C2B3A"/>
                 </a:solidFill>
-                <a:latin typeface="Calibri" pitchFamily="34" charset="0"/>
-                <a:ea typeface="Calibri" pitchFamily="34" charset="-122"/>
-                <a:cs typeface="Calibri" pitchFamily="34" charset="-120"/>
-              </a:rPr>
-              <a:t>CouponUsed</a:t>
-            </a:r>
-            <a:r>
-              <a:rPr lang="en-US" sz="1250" dirty="0">
+                <a:latin typeface="Calibri"/>
+              </a:rPr>
+              <a:t/>
+            </a:r>
+          </a:p>
+          <a:p>
+            <a:r>
+              <a:rPr sz="860" b="1">
+                <a:solidFill>
+                  <a:srgbClr val="1E3A5F"/>
+                </a:solidFill>
+                <a:latin typeface="Calibri"/>
+              </a:rPr>
+              <a:t>KNN (k=5, weights=distance) - Tenure, OrderCount, DaySinceLastOrder, HourSpendOnApp, OrderAmountHike</a:t>
+            </a:r>
+          </a:p>
+          <a:p>
+            <a:r>
+              <a:rPr sz="860" b="0">
                 <a:solidFill>
                   <a:srgbClr val="1C2B3A"/>
                 </a:solidFill>
-                <a:latin typeface="Calibri" pitchFamily="34" charset="0"/>
-                <a:ea typeface="Calibri" pitchFamily="34" charset="-122"/>
-                <a:cs typeface="Calibri" pitchFamily="34" charset="-120"/>
-              </a:rPr>
-              <a:t> </a:t>
-            </a:r>
-          </a:p>
-          <a:p>
-            <a:pPr>
-              <a:spcAft>
-                <a:spcPts val="600"/>
-              </a:spcAft>
-              <a:buSzPct val="100000"/>
-            </a:pPr>
-            <a:r>
-              <a:rPr lang="en-US" sz="1250" dirty="0">
+                <a:latin typeface="Calibri"/>
+              </a:rPr>
+              <a:t>Mejor MAE (Mean Absolute Error) frente a Regresión y Mediana</a:t>
+            </a:r>
+          </a:p>
+          <a:p>
+            <a:r>
+              <a:rPr sz="860" b="0">
                 <a:solidFill>
                   <a:srgbClr val="1C2B3A"/>
                 </a:solidFill>
-                <a:latin typeface="Calibri" pitchFamily="34" charset="0"/>
-                <a:ea typeface="Calibri" pitchFamily="34" charset="-122"/>
-                <a:cs typeface="Calibri" pitchFamily="34" charset="-120"/>
-              </a:rPr>
-              <a:t>No </a:t>
-            </a:r>
-            <a:r>
-              <a:rPr lang="en-US" sz="1250" dirty="0" err="1">
+                <a:latin typeface="Calibri"/>
+              </a:rPr>
+              <a:t/>
+            </a:r>
+          </a:p>
+          <a:p>
+            <a:r>
+              <a:rPr sz="860" b="1">
+                <a:solidFill>
+                  <a:srgbClr val="1E3A5F"/>
+                </a:solidFill>
+                <a:latin typeface="Calibri"/>
+              </a:rPr>
+              <a:t>Outliers - eliminados solo de gráficos del EDA</a:t>
+            </a:r>
+          </a:p>
+          <a:p>
+            <a:r>
+              <a:rPr sz="860" b="0">
                 <a:solidFill>
                   <a:srgbClr val="1C2B3A"/>
                 </a:solidFill>
-                <a:latin typeface="Calibri" pitchFamily="34" charset="0"/>
-                <a:ea typeface="Calibri" pitchFamily="34" charset="-122"/>
-                <a:cs typeface="Calibri" pitchFamily="34" charset="-120"/>
-              </a:rPr>
-              <a:t>tienen</a:t>
-            </a:r>
-            <a:r>
-              <a:rPr lang="en-US" sz="1250" dirty="0">
+                <a:latin typeface="Calibri"/>
+              </a:rPr>
+              <a:t>WarehouseToHome: 2 extremos</a:t>
+            </a:r>
+          </a:p>
+          <a:p>
+            <a:r>
+              <a:rPr sz="860" b="0">
                 <a:solidFill>
                   <a:srgbClr val="1C2B3A"/>
                 </a:solidFill>
-                <a:latin typeface="Calibri" pitchFamily="34" charset="0"/>
-                <a:ea typeface="Calibri" pitchFamily="34" charset="-122"/>
-                <a:cs typeface="Calibri" pitchFamily="34" charset="-120"/>
-              </a:rPr>
-              <a:t> </a:t>
-            </a:r>
-            <a:r>
-              <a:rPr lang="en-US" sz="1250" dirty="0" err="1">
+                <a:latin typeface="Calibri"/>
+              </a:rPr>
+              <a:t>Tenure: 4 extremos</a:t>
+            </a:r>
+          </a:p>
+          <a:p>
+            <a:r>
+              <a:rPr sz="860" b="0">
                 <a:solidFill>
                   <a:srgbClr val="1C2B3A"/>
                 </a:solidFill>
-                <a:latin typeface="Calibri" pitchFamily="34" charset="0"/>
-                <a:ea typeface="Calibri" pitchFamily="34" charset="-122"/>
-                <a:cs typeface="Calibri" pitchFamily="34" charset="-120"/>
-              </a:rPr>
-              <a:t>relación</a:t>
-            </a:r>
-            <a:r>
-              <a:rPr lang="en-US" sz="1250" dirty="0">
-                <a:solidFill>
-                  <a:srgbClr val="1C2B3A"/>
-                </a:solidFill>
-                <a:latin typeface="Calibri" pitchFamily="34" charset="0"/>
-                <a:ea typeface="Calibri" pitchFamily="34" charset="-122"/>
-                <a:cs typeface="Calibri" pitchFamily="34" charset="-120"/>
-              </a:rPr>
-              <a:t> con </a:t>
-            </a:r>
-            <a:r>
-              <a:rPr lang="en-US" sz="1250" dirty="0" err="1">
-                <a:solidFill>
-                  <a:srgbClr val="1C2B3A"/>
-                </a:solidFill>
-                <a:latin typeface="Calibri" pitchFamily="34" charset="0"/>
-                <a:ea typeface="Calibri" pitchFamily="34" charset="-122"/>
-                <a:cs typeface="Calibri" pitchFamily="34" charset="-120"/>
-              </a:rPr>
-              <a:t>otras</a:t>
-            </a:r>
-            <a:r>
-              <a:rPr lang="en-US" sz="1250" dirty="0">
-                <a:solidFill>
-                  <a:srgbClr val="1C2B3A"/>
-                </a:solidFill>
-                <a:latin typeface="Calibri" pitchFamily="34" charset="0"/>
-                <a:ea typeface="Calibri" pitchFamily="34" charset="-122"/>
-                <a:cs typeface="Calibri" pitchFamily="34" charset="-120"/>
-              </a:rPr>
-              <a:t> variables</a:t>
-            </a:r>
-            <a:endParaRPr lang="en-US" sz="1250" dirty="0"/>
-          </a:p>
-          <a:p>
-            <a:pPr marL="342900" indent="-342900">
-              <a:spcAft>
-                <a:spcPts val="600"/>
-              </a:spcAft>
-              <a:buSzPct val="100000"/>
-              <a:buChar char="•"/>
-            </a:pPr>
-            <a:endParaRPr lang="en-US" sz="1250" dirty="0">
-              <a:solidFill>
-                <a:srgbClr val="1C2B3A"/>
-              </a:solidFill>
-              <a:latin typeface="Calibri" pitchFamily="34" charset="0"/>
-              <a:ea typeface="Calibri" pitchFamily="34" charset="-122"/>
-              <a:cs typeface="Calibri" pitchFamily="34" charset="-120"/>
-            </a:endParaRPr>
-          </a:p>
-          <a:p>
-            <a:pPr marL="342900" indent="-342900">
-              <a:spcAft>
-                <a:spcPts val="600"/>
-              </a:spcAft>
-              <a:buSzPct val="100000"/>
-              <a:buChar char="•"/>
-            </a:pPr>
-            <a:r>
-              <a:rPr lang="en-US" sz="1250" dirty="0">
-                <a:solidFill>
-                  <a:srgbClr val="1C2B3A"/>
-                </a:solidFill>
-                <a:latin typeface="Calibri" pitchFamily="34" charset="0"/>
-                <a:ea typeface="Calibri" pitchFamily="34" charset="-122"/>
-                <a:cs typeface="Calibri" pitchFamily="34" charset="-120"/>
-              </a:rPr>
-              <a:t>KNN Imputer (k=5, weight = “Distance”)  —  Tenure, OrderCount, </a:t>
-            </a:r>
-            <a:r>
-              <a:rPr lang="en-US" sz="1250" dirty="0" err="1">
-                <a:solidFill>
-                  <a:srgbClr val="1C2B3A"/>
-                </a:solidFill>
-                <a:latin typeface="Calibri" pitchFamily="34" charset="0"/>
-                <a:ea typeface="Calibri" pitchFamily="34" charset="-122"/>
-                <a:cs typeface="Calibri" pitchFamily="34" charset="-120"/>
-              </a:rPr>
-              <a:t>DaySinceLastOrder</a:t>
-            </a:r>
-            <a:r>
-              <a:rPr lang="en-US" sz="1250" dirty="0">
-                <a:solidFill>
-                  <a:srgbClr val="1C2B3A"/>
-                </a:solidFill>
-                <a:latin typeface="Calibri" pitchFamily="34" charset="0"/>
-                <a:ea typeface="Calibri" pitchFamily="34" charset="-122"/>
-                <a:cs typeface="Calibri" pitchFamily="34" charset="-120"/>
-              </a:rPr>
-              <a:t>, </a:t>
-            </a:r>
-            <a:r>
-              <a:rPr lang="en-US" sz="1250" dirty="0" err="1">
-                <a:solidFill>
-                  <a:srgbClr val="1C2B3A"/>
-                </a:solidFill>
-                <a:latin typeface="Calibri" pitchFamily="34" charset="0"/>
-                <a:ea typeface="Calibri" pitchFamily="34" charset="-122"/>
-                <a:cs typeface="Calibri" pitchFamily="34" charset="-120"/>
-              </a:rPr>
-              <a:t>HourSpendOnApp</a:t>
-            </a:r>
-            <a:r>
-              <a:rPr lang="en-US" sz="1250" dirty="0">
-                <a:solidFill>
-                  <a:srgbClr val="1C2B3A"/>
-                </a:solidFill>
-                <a:latin typeface="Calibri" pitchFamily="34" charset="0"/>
-                <a:ea typeface="Calibri" pitchFamily="34" charset="-122"/>
-                <a:cs typeface="Calibri" pitchFamily="34" charset="-120"/>
-              </a:rPr>
-              <a:t>, </a:t>
-            </a:r>
-            <a:r>
-              <a:rPr lang="en-US" sz="1250" dirty="0" err="1">
-                <a:solidFill>
-                  <a:srgbClr val="1C2B3A"/>
-                </a:solidFill>
-                <a:latin typeface="Calibri" pitchFamily="34" charset="0"/>
-                <a:ea typeface="Calibri" pitchFamily="34" charset="-122"/>
-                <a:cs typeface="Calibri" pitchFamily="34" charset="-120"/>
-              </a:rPr>
-              <a:t>OrderAmountHike</a:t>
-            </a:r>
-            <a:endParaRPr lang="en-US" sz="1250" dirty="0">
-              <a:solidFill>
-                <a:srgbClr val="1C2B3A"/>
-              </a:solidFill>
-              <a:latin typeface="Calibri" pitchFamily="34" charset="0"/>
-              <a:ea typeface="Calibri" pitchFamily="34" charset="-122"/>
-              <a:cs typeface="Calibri" pitchFamily="34" charset="-120"/>
-            </a:endParaRPr>
-          </a:p>
-          <a:p>
-            <a:pPr>
-              <a:spcAft>
-                <a:spcPts val="600"/>
-              </a:spcAft>
-              <a:buSzPct val="100000"/>
-            </a:pPr>
-            <a:r>
-              <a:rPr lang="en-US" sz="1250" dirty="0" err="1">
-                <a:solidFill>
-                  <a:srgbClr val="1C2B3A"/>
-                </a:solidFill>
-                <a:latin typeface="Calibri" pitchFamily="34" charset="0"/>
-                <a:ea typeface="Calibri" pitchFamily="34" charset="-122"/>
-                <a:cs typeface="Calibri" pitchFamily="34" charset="-120"/>
-              </a:rPr>
-              <a:t>Estandarización</a:t>
-            </a:r>
-            <a:r>
-              <a:rPr lang="en-US" sz="1250" dirty="0">
-                <a:solidFill>
-                  <a:srgbClr val="1C2B3A"/>
-                </a:solidFill>
-                <a:latin typeface="Calibri" pitchFamily="34" charset="0"/>
-                <a:ea typeface="Calibri" pitchFamily="34" charset="-122"/>
-                <a:cs typeface="Calibri" pitchFamily="34" charset="-120"/>
-              </a:rPr>
-              <a:t> previa, </a:t>
-            </a:r>
-            <a:r>
-              <a:rPr lang="en-US" sz="1250" dirty="0" err="1">
-                <a:solidFill>
-                  <a:srgbClr val="1C2B3A"/>
-                </a:solidFill>
-                <a:latin typeface="Calibri" pitchFamily="34" charset="0"/>
-                <a:ea typeface="Calibri" pitchFamily="34" charset="-122"/>
-                <a:cs typeface="Calibri" pitchFamily="34" charset="-120"/>
-              </a:rPr>
-              <a:t>menor</a:t>
-            </a:r>
-            <a:r>
-              <a:rPr lang="en-US" sz="1250" dirty="0">
-                <a:solidFill>
-                  <a:srgbClr val="1C2B3A"/>
-                </a:solidFill>
-                <a:latin typeface="Calibri" pitchFamily="34" charset="0"/>
-                <a:ea typeface="Calibri" pitchFamily="34" charset="-122"/>
-                <a:cs typeface="Calibri" pitchFamily="34" charset="-120"/>
-              </a:rPr>
-              <a:t> MAE </a:t>
-            </a:r>
-            <a:r>
-              <a:rPr lang="en-US" sz="1250" dirty="0" err="1">
-                <a:solidFill>
-                  <a:srgbClr val="1C2B3A"/>
-                </a:solidFill>
-                <a:latin typeface="Calibri" pitchFamily="34" charset="0"/>
-                <a:ea typeface="Calibri" pitchFamily="34" charset="-122"/>
-                <a:cs typeface="Calibri" pitchFamily="34" charset="-120"/>
-              </a:rPr>
-              <a:t>en</a:t>
-            </a:r>
-            <a:r>
-              <a:rPr lang="en-US" sz="1250" dirty="0">
-                <a:solidFill>
-                  <a:srgbClr val="1C2B3A"/>
-                </a:solidFill>
-                <a:latin typeface="Calibri" pitchFamily="34" charset="0"/>
-                <a:ea typeface="Calibri" pitchFamily="34" charset="-122"/>
-                <a:cs typeface="Calibri" pitchFamily="34" charset="-120"/>
-              </a:rPr>
-              <a:t> </a:t>
-            </a:r>
-            <a:r>
-              <a:rPr lang="en-US" sz="1250" dirty="0" err="1">
-                <a:solidFill>
-                  <a:srgbClr val="1C2B3A"/>
-                </a:solidFill>
-                <a:latin typeface="Calibri" pitchFamily="34" charset="0"/>
-                <a:ea typeface="Calibri" pitchFamily="34" charset="-122"/>
-                <a:cs typeface="Calibri" pitchFamily="34" charset="-120"/>
-              </a:rPr>
-              <a:t>relación</a:t>
-            </a:r>
-            <a:r>
-              <a:rPr lang="en-US" sz="1250" dirty="0">
-                <a:solidFill>
-                  <a:srgbClr val="1C2B3A"/>
-                </a:solidFill>
-                <a:latin typeface="Calibri" pitchFamily="34" charset="0"/>
-                <a:ea typeface="Calibri" pitchFamily="34" charset="-122"/>
-                <a:cs typeface="Calibri" pitchFamily="34" charset="-120"/>
-              </a:rPr>
-              <a:t> a la </a:t>
-            </a:r>
-            <a:r>
-              <a:rPr lang="en-US" sz="1250" dirty="0" err="1">
-                <a:solidFill>
-                  <a:srgbClr val="1C2B3A"/>
-                </a:solidFill>
-                <a:latin typeface="Calibri" pitchFamily="34" charset="0"/>
-                <a:ea typeface="Calibri" pitchFamily="34" charset="-122"/>
-                <a:cs typeface="Calibri" pitchFamily="34" charset="-120"/>
-              </a:rPr>
-              <a:t>imputación</a:t>
-            </a:r>
-            <a:r>
-              <a:rPr lang="en-US" sz="1250" dirty="0">
-                <a:solidFill>
-                  <a:srgbClr val="1C2B3A"/>
-                </a:solidFill>
-                <a:latin typeface="Calibri" pitchFamily="34" charset="0"/>
-                <a:ea typeface="Calibri" pitchFamily="34" charset="-122"/>
-                <a:cs typeface="Calibri" pitchFamily="34" charset="-120"/>
-              </a:rPr>
-              <a:t> </a:t>
-            </a:r>
-            <a:r>
-              <a:rPr lang="en-US" sz="1250" dirty="0" err="1">
-                <a:solidFill>
-                  <a:srgbClr val="1C2B3A"/>
-                </a:solidFill>
-                <a:latin typeface="Calibri" pitchFamily="34" charset="0"/>
-                <a:ea typeface="Calibri" pitchFamily="34" charset="-122"/>
-                <a:cs typeface="Calibri" pitchFamily="34" charset="-120"/>
-              </a:rPr>
-              <a:t>por</a:t>
-            </a:r>
-            <a:r>
-              <a:rPr lang="en-US" sz="1250" dirty="0">
-                <a:solidFill>
-                  <a:srgbClr val="1C2B3A"/>
-                </a:solidFill>
-                <a:latin typeface="Calibri" pitchFamily="34" charset="0"/>
-                <a:ea typeface="Calibri" pitchFamily="34" charset="-122"/>
-                <a:cs typeface="Calibri" pitchFamily="34" charset="-120"/>
-              </a:rPr>
-              <a:t> </a:t>
-            </a:r>
-            <a:r>
-              <a:rPr lang="en-US" sz="1250" dirty="0" err="1">
-                <a:solidFill>
-                  <a:srgbClr val="1C2B3A"/>
-                </a:solidFill>
-                <a:latin typeface="Calibri" pitchFamily="34" charset="0"/>
-                <a:ea typeface="Calibri" pitchFamily="34" charset="-122"/>
-                <a:cs typeface="Calibri" pitchFamily="34" charset="-120"/>
-              </a:rPr>
-              <a:t>Regresión</a:t>
-            </a:r>
-            <a:r>
-              <a:rPr lang="en-US" sz="1250" dirty="0">
-                <a:solidFill>
-                  <a:srgbClr val="1C2B3A"/>
-                </a:solidFill>
-                <a:latin typeface="Calibri" pitchFamily="34" charset="0"/>
-                <a:ea typeface="Calibri" pitchFamily="34" charset="-122"/>
-                <a:cs typeface="Calibri" pitchFamily="34" charset="-120"/>
-              </a:rPr>
-              <a:t> y Mediana </a:t>
-            </a:r>
-          </a:p>
-          <a:p>
-            <a:pPr>
-              <a:spcAft>
-                <a:spcPts val="600"/>
-              </a:spcAft>
-              <a:buSzPct val="100000"/>
-            </a:pPr>
-            <a:endParaRPr lang="en-US" sz="1250" dirty="0">
-              <a:solidFill>
-                <a:srgbClr val="1C2B3A"/>
-              </a:solidFill>
-              <a:latin typeface="Calibri" pitchFamily="34" charset="0"/>
-              <a:ea typeface="Calibri" pitchFamily="34" charset="-122"/>
-              <a:cs typeface="Calibri" pitchFamily="34" charset="-120"/>
-            </a:endParaRPr>
-          </a:p>
-          <a:p>
-            <a:pPr marL="342900" indent="-342900">
-              <a:spcAft>
-                <a:spcPts val="600"/>
-              </a:spcAft>
-              <a:buSzPct val="100000"/>
-              <a:buChar char="•"/>
-            </a:pPr>
-            <a:endParaRPr lang="en-US" sz="1250" dirty="0">
-              <a:solidFill>
-                <a:srgbClr val="1C2B3A"/>
-              </a:solidFill>
-              <a:latin typeface="Calibri" pitchFamily="34" charset="0"/>
-              <a:ea typeface="Calibri" pitchFamily="34" charset="-122"/>
-              <a:cs typeface="Calibri" pitchFamily="34" charset="-120"/>
-            </a:endParaRPr>
-          </a:p>
-          <a:p>
-            <a:pPr>
-              <a:spcAft>
-                <a:spcPts val="600"/>
-              </a:spcAft>
-              <a:buSzPct val="100000"/>
-            </a:pPr>
-            <a:endParaRPr lang="en-US" sz="1250" dirty="0">
-              <a:solidFill>
-                <a:srgbClr val="1C2B3A"/>
-              </a:solidFill>
-              <a:latin typeface="Calibri" pitchFamily="34" charset="0"/>
-              <a:ea typeface="Calibri" pitchFamily="34" charset="-122"/>
-              <a:cs typeface="Calibri" pitchFamily="34" charset="-120"/>
-            </a:endParaRPr>
+                <a:latin typeface="Calibri"/>
+              </a:rPr>
+              <a:t>DaySinceLastOrder: 1 valor máximo</a:t>
+            </a:r>
           </a:p>
         </p:txBody>
       </p:sp>
@@ -22507,21 +22166,16 @@
           <a:bodyPr wrap="square" lIns="0" tIns="0" rIns="0" bIns="0" rtlCol="0" anchor="ctr"/>
           <a:lstStyle/>
           <a:p>
-            <a:pPr marL="0" indent="0">
-              <a:buNone/>
-            </a:pPr>
-            <a:r>
-              <a:rPr lang="en-US" sz="1250" i="1" dirty="0">
+            <a:pPr algn="ctr"/>
+            <a:r>
+              <a:rPr sz="1100">
                 <a:solidFill>
                   <a:srgbClr val="1C2B3A"/>
                 </a:solidFill>
-                <a:latin typeface="Calibri" pitchFamily="34" charset="0"/>
-                <a:ea typeface="Calibri" pitchFamily="34" charset="-122"/>
-                <a:cs typeface="Calibri" pitchFamily="34" charset="-120"/>
-              </a:rPr>
-              <a:t>La imputación y el escalado se ajustan dentro de cada fold, solo con train: nunca con validación ni test.</a:t>
-            </a:r>
-            <a:endParaRPr lang="en-US" sz="1250" dirty="0"/>
+                <a:latin typeface="Calibri"/>
+              </a:rPr>
+              <a:t>Imputación y escalado se ajustan dentro de cada fold, solo con train: nunca con validación ni test.</a:t>
+            </a:r>
           </a:p>
         </p:txBody>
       </p:sp>
@@ -22759,13 +22413,11 @@
               <a:buNone/>
             </a:pPr>
             <a:r>
-              <a:rPr lang="en-US" sz="1200" b="1" kern="0" spc="300" dirty="0">
+              <a:rPr sz="1200" b="1">
                 <a:solidFill>
                   <a:srgbClr val="DA6A3C"/>
                 </a:solidFill>
-                <a:latin typeface="Calibri" pitchFamily="34" charset="0"/>
-                <a:ea typeface="Calibri" pitchFamily="34" charset="-122"/>
-                <a:cs typeface="Calibri" pitchFamily="34" charset="-120"/>
+                <a:latin typeface="Calibri"/>
               </a:rPr>
               <a:t>03  ·  SPLIT AGRUPADO</a:t>
             </a:r>
@@ -22794,21 +22446,15 @@
           <a:bodyPr wrap="square" lIns="0" tIns="0" rIns="0" bIns="0" rtlCol="0" anchor="ctr"/>
           <a:lstStyle/>
           <a:p>
-            <a:pPr marL="0" indent="0">
-              <a:buNone/>
-            </a:pPr>
-            <a:r>
-              <a:rPr lang="en-US" sz="2700" b="1" dirty="0">
+            <a:r>
+              <a:rPr sz="2700" b="1">
                 <a:solidFill>
                   <a:srgbClr val="1C2B3A"/>
                 </a:solidFill>
-                <a:latin typeface="Georgia" pitchFamily="34" charset="0"/>
-                <a:ea typeface="Georgia" pitchFamily="34" charset="-122"/>
-                <a:cs typeface="Georgia" pitchFamily="34" charset="-120"/>
-              </a:rPr>
-              <a:t>StratifiedGroupKFold, sin perfiles compartidos</a:t>
-            </a:r>
-            <a:endParaRPr lang="en-US" sz="2700" dirty="0"/>
+                <a:latin typeface="Georgia"/>
+              </a:rPr>
+              <a:t>StratifiedGroupKFold: evaluación más honesta</a:t>
+            </a:r>
           </a:p>
         </p:txBody>
       </p:sp>
@@ -22891,21 +22537,15 @@
           <a:bodyPr wrap="square" lIns="0" tIns="0" rIns="0" bIns="0" rtlCol="0" anchor="ctr"/>
           <a:lstStyle/>
           <a:p>
-            <a:pPr marL="0" indent="0">
-              <a:buNone/>
-            </a:pPr>
-            <a:r>
-              <a:rPr lang="en-US" sz="1600" b="1" dirty="0">
+            <a:r>
+              <a:rPr sz="1600" b="1">
                 <a:solidFill>
                   <a:srgbClr val="1C2B3A"/>
                 </a:solidFill>
-                <a:latin typeface="Georgia" pitchFamily="34" charset="0"/>
-                <a:ea typeface="Georgia" pitchFamily="34" charset="-122"/>
-                <a:cs typeface="Georgia" pitchFamily="34" charset="-120"/>
-              </a:rPr>
-              <a:t>Definición del grupo</a:t>
-            </a:r>
-            <a:endParaRPr lang="en-US" sz="1600" dirty="0"/>
+                <a:latin typeface="Georgia"/>
+              </a:rPr>
+              <a:t>Cómo definimos el grupo</a:t>
+            </a:r>
           </a:p>
         </p:txBody>
       </p:sp>
@@ -22930,64 +22570,84 @@
           <a:bodyPr wrap="square" rtlCol="0" anchor="t"/>
           <a:lstStyle/>
           <a:p>
-            <a:pPr marL="342900" indent="-342900">
+            <a:pPr>
               <a:spcAft>
-                <a:spcPts val="900"/>
+                <a:spcPts val="100"/>
               </a:spcAft>
-              <a:buSzPct val="100000"/>
-              <a:buChar char="•"/>
             </a:pPr>
             <a:r>
-              <a:rPr lang="en-US" sz="1350" dirty="0">
+              <a:rPr sz="1030" b="1">
+                <a:solidFill>
+                  <a:srgbClr val="1E3A5F"/>
+                </a:solidFill>
+                <a:latin typeface="Calibri"/>
+              </a:rPr>
+              <a:t>StratifiedGroupKFold (5 folds, shuffle=True, random_state=42)</a:t>
+            </a:r>
+          </a:p>
+          <a:p>
+            <a:pPr>
+              <a:spcAft>
+                <a:spcPts val="100"/>
+              </a:spcAft>
+            </a:pPr>
+            <a:r>
+              <a:rPr sz="1030" b="0">
                 <a:solidFill>
                   <a:srgbClr val="1C2B3A"/>
                 </a:solidFill>
-                <a:latin typeface="Calibri" pitchFamily="34" charset="0"/>
-                <a:ea typeface="Calibri" pitchFamily="34" charset="-122"/>
-                <a:cs typeface="Calibri" pitchFamily="34" charset="-120"/>
-              </a:rPr>
-              <a:t>StratifiedGroupKFold (5 folds, shuffle = True, random_state=42)</a:t>
-            </a:r>
-            <a:endParaRPr lang="en-US" sz="1350" dirty="0"/>
-          </a:p>
-          <a:p>
-            <a:pPr marL="342900" indent="-342900">
+                <a:latin typeface="Calibri"/>
+              </a:rPr>
+              <a:t>Entrena con 4 folds y valida con 1, manteniendo la proporción de churn.</a:t>
+            </a:r>
+          </a:p>
+          <a:p>
+            <a:pPr>
               <a:spcAft>
-                <a:spcPts val="900"/>
+                <a:spcPts val="100"/>
               </a:spcAft>
-              <a:buSzPct val="100000"/>
-              <a:buChar char="•"/>
             </a:pPr>
             <a:r>
-              <a:rPr lang="en-US" sz="1350" dirty="0">
+              <a:rPr sz="1030" b="0">
                 <a:solidFill>
                   <a:srgbClr val="1C2B3A"/>
                 </a:solidFill>
-                <a:latin typeface="Calibri" pitchFamily="34" charset="0"/>
-                <a:ea typeface="Calibri" pitchFamily="34" charset="-122"/>
-                <a:cs typeface="Calibri" pitchFamily="34" charset="-120"/>
-              </a:rPr>
-              <a:t>No incluye CustomerID ni Churn</a:t>
-            </a:r>
-            <a:endParaRPr lang="en-US" sz="1350" dirty="0"/>
-          </a:p>
-          <a:p>
-            <a:pPr marL="342900" indent="-342900">
-              <a:buSzPct val="100000"/>
-              <a:buChar char="•"/>
+                <a:latin typeface="Calibri"/>
+              </a:rPr>
+              <a:t>Agrupa perfiles equivalentes: no se repiten entre entrenamiento y validación.</a:t>
+            </a:r>
+          </a:p>
+          <a:p>
+            <a:pPr>
+              <a:spcAft>
+                <a:spcPts val="100"/>
+              </a:spcAft>
             </a:pPr>
             <a:r>
-              <a:rPr lang="en-US" sz="1350" dirty="0">
+              <a:rPr sz="1030" b="0">
                 <a:solidFill>
                   <a:srgbClr val="1C2B3A"/>
                 </a:solidFill>
-                <a:latin typeface="Calibri" pitchFamily="34" charset="0"/>
-                <a:ea typeface="Calibri" pitchFamily="34" charset="-122"/>
-                <a:cs typeface="Calibri" pitchFamily="34" charset="-120"/>
-              </a:rPr>
-              <a:t>El test no se usa para elegir modelo, features ni umbral</a:t>
-            </a:r>
-            <a:endParaRPr lang="en-US" sz="1350" dirty="0"/>
+                <a:latin typeface="Calibri"/>
+              </a:rPr>
+              <a:t>No usa CustomerID ni Churn para definir los grupos.</a:t>
+            </a:r>
+          </a:p>
+          <a:p>
+            <a:pPr>
+              <a:spcAft>
+                <a:spcPts val="100"/>
+              </a:spcAft>
+            </a:pPr>
+            <a:r>
+              <a:rPr sz="1030" b="1">
+                <a:solidFill>
+                  <a:srgbClr val="1C2B3A"/>
+                </a:solidFill>
+                <a:latin typeface="Calibri"/>
+              </a:rPr>
+              <a:t>El test queda cerrado: solo se usa para medir el resultado final.</a:t>
+            </a:r>
           </a:p>
         </p:txBody>
       </p:sp>
@@ -23736,8 +23396,8 @@
         </p:nvSpPr>
         <p:spPr>
           <a:xfrm>
-            <a:off x="6263640" y="4846320"/>
-            <a:ext cx="5376672" cy="548640"/>
+            <a:off x="6263640" y="4754880"/>
+            <a:ext cx="5376672" cy="731520"/>
           </a:xfrm>
           <a:prstGeom prst="rect">
             <a:avLst/>
@@ -23749,21 +23409,28 @@
           <a:bodyPr wrap="square" lIns="0" tIns="0" rIns="0" bIns="0" rtlCol="0" anchor="ctr"/>
           <a:lstStyle/>
           <a:p>
-            <a:pPr marL="0" indent="0" algn="ctr">
-              <a:buNone/>
-            </a:pPr>
-            <a:r>
-              <a:rPr lang="en-US" sz="1400" dirty="0">
-                <a:solidFill>
-                  <a:srgbClr val="C9D4E4"/>
-                </a:solidFill>
-                <a:latin typeface="Calibri" pitchFamily="34" charset="0"/>
-                <a:ea typeface="Calibri" pitchFamily="34" charset="-122"/>
-                <a:cs typeface="Calibri" pitchFamily="34" charset="-120"/>
-              </a:rPr>
-              <a:t>perfiles compartidos entre train y test</a:t>
-            </a:r>
-            <a:endParaRPr lang="en-US" sz="1400" dirty="0"/>
+            <a:pPr algn="ctr"/>
+            <a:r>
+              <a:rPr sz="1600" b="1">
+                <a:solidFill>
+                  <a:srgbClr val="FFFFFF"/>
+                </a:solidFill>
+                <a:latin typeface="Calibri"/>
+              </a:rPr>
+              <a:t>perfiles compartidos</a:t>
+            </a:r>
+          </a:p>
+          <a:p>
+            <a:pPr algn="ctr"/>
+            <a:r>
+              <a:rPr sz="1600" b="1">
+                <a:solidFill>
+                  <a:srgbClr val="FFFFFF"/>
+                </a:solidFill>
+                <a:latin typeface="Calibri"/>
+              </a:rPr>
+              <a:t>entre train y test</a:t>
+            </a:r>
           </a:p>
         </p:txBody>
       </p:sp>
